--- a/Training/芯片检测模型训练 Chip Detection Model Training.pptx
+++ b/Training/芯片检测模型训练 Chip Detection Model Training.pptx
@@ -2256,7 +2256,7 @@
                   <a:ea typeface="微软雅黑" panose="020B0503020204020204" charset="-122"/>
                   <a:sym typeface="+mn-ea"/>
                 </a:rPr>
-                <a:t>芯片检测结果 </a:t>
+                <a:t>螺丝尺寸检测结果 </a:t>
               </a:r>
               <a:r>
                 <a:rPr lang="en-US" altLang="zh-CN" dirty="0">
@@ -2267,7 +2267,7 @@
                   <a:ea typeface="微软雅黑" panose="020B0503020204020204" charset="-122"/>
                   <a:sym typeface="+mn-ea"/>
                 </a:rPr>
-                <a:t>| Chip detection results</a:t>
+                <a:t>| Screw size detection results</a:t>
               </a:r>
               <a:endParaRPr lang="zh-CN" altLang="en-US" dirty="0">
                 <a:solidFill>
@@ -6941,7 +6941,18 @@
                   <a:ea typeface="微软雅黑" panose="020B0503020204020204" charset="-122"/>
                   <a:sym typeface="+mn-ea"/>
                 </a:rPr>
-                <a:t>New Model Training Task (Following the Example)</a:t>
+                <a:t>New Model Training Task (Following the Example) : </a:t>
+              </a:r>
+              <a:r>
+                <a:rPr lang="en-US" altLang="zh-CN" dirty="0">
+                  <a:solidFill>
+                    <a:srgbClr val="FF0000"/>
+                  </a:solidFill>
+                  <a:latin typeface="微软雅黑" panose="020B0503020204020204" charset="-122"/>
+                  <a:ea typeface="微软雅黑" panose="020B0503020204020204" charset="-122"/>
+                  <a:sym typeface="+mn-ea"/>
+                </a:rPr>
+                <a:t>Screw Size Detection </a:t>
               </a:r>
               <a:endParaRPr lang="zh-CN" altLang="en-US" dirty="0">
                 <a:solidFill>

--- a/Training/芯片检测模型训练 Chip Detection Model Training.pptx
+++ b/Training/芯片检测模型训练 Chip Detection Model Training.pptx
@@ -9,8 +9,8 @@
   </p:notesMasterIdLst>
   <p:sldIdLst>
     <p:sldId id="256" r:id="rId2"/>
-    <p:sldId id="262" r:id="rId3"/>
-    <p:sldId id="263" r:id="rId4"/>
+    <p:sldId id="263" r:id="rId3"/>
+    <p:sldId id="262" r:id="rId4"/>
     <p:sldId id="264" r:id="rId5"/>
     <p:sldId id="265" r:id="rId6"/>
     <p:sldId id="266" r:id="rId7"/>
@@ -3243,6 +3243,734 @@
       </p:grpSpPr>
       <p:grpSp>
         <p:nvGrpSpPr>
+          <p:cNvPr id="5" name="组合 4">
+            <a:extLst>
+              <a:ext uri="{FF2B5EF4-FFF2-40B4-BE49-F238E27FC236}">
+                <a16:creationId xmlns:a16="http://schemas.microsoft.com/office/drawing/2014/main" id="{79DEFE29-5B6B-8DE1-28D6-EC59310C3935}"/>
+              </a:ext>
+            </a:extLst>
+          </p:cNvPr>
+          <p:cNvGrpSpPr/>
+          <p:nvPr/>
+        </p:nvGrpSpPr>
+        <p:grpSpPr>
+          <a:xfrm>
+            <a:off x="487218" y="823179"/>
+            <a:ext cx="8875320" cy="369332"/>
+            <a:chOff x="470561" y="949180"/>
+            <a:chExt cx="8875320" cy="369332"/>
+          </a:xfrm>
+        </p:grpSpPr>
+        <p:pic>
+          <p:nvPicPr>
+            <p:cNvPr id="6" name="图片 5">
+              <a:extLst>
+                <a:ext uri="{FF2B5EF4-FFF2-40B4-BE49-F238E27FC236}">
+                  <a16:creationId xmlns:a16="http://schemas.microsoft.com/office/drawing/2014/main" id="{2287952E-1495-E129-8136-418B1DE9C9A5}"/>
+                </a:ext>
+              </a:extLst>
+            </p:cNvPr>
+            <p:cNvPicPr>
+              <a:picLocks noChangeAspect="1"/>
+            </p:cNvPicPr>
+            <p:nvPr/>
+          </p:nvPicPr>
+          <p:blipFill>
+            <a:blip r:embed="rId2">
+              <a:extLst>
+                <a:ext uri="{28A0092B-C50C-407E-A947-70E740481C1C}">
+                  <a14:useLocalDpi xmlns:a14="http://schemas.microsoft.com/office/drawing/2010/main" val="0"/>
+                </a:ext>
+              </a:extLst>
+            </a:blip>
+            <a:stretch>
+              <a:fillRect/>
+            </a:stretch>
+          </p:blipFill>
+          <p:spPr>
+            <a:xfrm>
+              <a:off x="470561" y="962396"/>
+              <a:ext cx="342900" cy="342900"/>
+            </a:xfrm>
+            <a:prstGeom prst="rect">
+              <a:avLst/>
+            </a:prstGeom>
+          </p:spPr>
+        </p:pic>
+        <p:sp>
+          <p:nvSpPr>
+            <p:cNvPr id="7" name="文本框 6">
+              <a:extLst>
+                <a:ext uri="{FF2B5EF4-FFF2-40B4-BE49-F238E27FC236}">
+                  <a16:creationId xmlns:a16="http://schemas.microsoft.com/office/drawing/2014/main" id="{E6FF3A55-6C0A-26EE-49B7-AD0F4B00BC31}"/>
+                </a:ext>
+              </a:extLst>
+            </p:cNvPr>
+            <p:cNvSpPr txBox="1"/>
+            <p:nvPr/>
+          </p:nvSpPr>
+          <p:spPr>
+            <a:xfrm>
+              <a:off x="813461" y="949180"/>
+              <a:ext cx="8532420" cy="369332"/>
+            </a:xfrm>
+            <a:prstGeom prst="rect">
+              <a:avLst/>
+            </a:prstGeom>
+            <a:noFill/>
+          </p:spPr>
+          <p:txBody>
+            <a:bodyPr wrap="square" rtlCol="0" anchor="t">
+              <a:spAutoFit/>
+            </a:bodyPr>
+            <a:lstStyle/>
+            <a:p>
+              <a:r>
+                <a:rPr lang="zh-CN" altLang="en-US" dirty="0">
+                  <a:solidFill>
+                    <a:srgbClr val="0070C0"/>
+                  </a:solidFill>
+                  <a:latin typeface="微软雅黑" panose="020B0503020204020204" charset="-122"/>
+                  <a:ea typeface="微软雅黑" panose="020B0503020204020204" charset="-122"/>
+                  <a:sym typeface="+mn-ea"/>
+                </a:rPr>
+                <a:t>芯片检测演示 </a:t>
+              </a:r>
+              <a:r>
+                <a:rPr lang="en-US" altLang="zh-CN" dirty="0">
+                  <a:solidFill>
+                    <a:srgbClr val="0070C0"/>
+                  </a:solidFill>
+                  <a:latin typeface="微软雅黑" panose="020B0503020204020204" charset="-122"/>
+                  <a:ea typeface="微软雅黑" panose="020B0503020204020204" charset="-122"/>
+                  <a:sym typeface="+mn-ea"/>
+                </a:rPr>
+                <a:t>| Chip detection demonstration</a:t>
+              </a:r>
+              <a:endParaRPr lang="zh-CN" altLang="en-US" dirty="0">
+                <a:solidFill>
+                  <a:srgbClr val="FF0000"/>
+                </a:solidFill>
+                <a:latin typeface="微软雅黑" panose="020B0503020204020204" charset="-122"/>
+                <a:ea typeface="微软雅黑" panose="020B0503020204020204" charset="-122"/>
+                <a:sym typeface="+mn-ea"/>
+              </a:endParaRPr>
+            </a:p>
+          </p:txBody>
+        </p:sp>
+      </p:grpSp>
+      <p:grpSp>
+        <p:nvGrpSpPr>
+          <p:cNvPr id="2" name="组合 1">
+            <a:extLst>
+              <a:ext uri="{FF2B5EF4-FFF2-40B4-BE49-F238E27FC236}">
+                <a16:creationId xmlns:a16="http://schemas.microsoft.com/office/drawing/2014/main" id="{F5B3DDD8-16CE-339D-38AA-BD8707A07CD3}"/>
+              </a:ext>
+            </a:extLst>
+          </p:cNvPr>
+          <p:cNvGrpSpPr/>
+          <p:nvPr/>
+        </p:nvGrpSpPr>
+        <p:grpSpPr>
+          <a:xfrm>
+            <a:off x="645391" y="1738725"/>
+            <a:ext cx="5025737" cy="4496151"/>
+            <a:chOff x="645391" y="1738725"/>
+            <a:chExt cx="5025737" cy="4496151"/>
+          </a:xfrm>
+        </p:grpSpPr>
+        <p:pic>
+          <p:nvPicPr>
+            <p:cNvPr id="3" name="图片 2" descr="图标&#10;&#10;描述已自动生成">
+              <a:extLst>
+                <a:ext uri="{FF2B5EF4-FFF2-40B4-BE49-F238E27FC236}">
+                  <a16:creationId xmlns:a16="http://schemas.microsoft.com/office/drawing/2014/main" id="{8163A0C7-E267-CEBA-6E48-9022EC24364E}"/>
+                </a:ext>
+              </a:extLst>
+            </p:cNvPr>
+            <p:cNvPicPr>
+              <a:picLocks noChangeAspect="1"/>
+            </p:cNvPicPr>
+            <p:nvPr/>
+          </p:nvPicPr>
+          <p:blipFill>
+            <a:blip r:embed="rId3">
+              <a:extLst>
+                <a:ext uri="{28A0092B-C50C-407E-A947-70E740481C1C}">
+                  <a14:useLocalDpi xmlns:a14="http://schemas.microsoft.com/office/drawing/2010/main" val="0"/>
+                </a:ext>
+              </a:extLst>
+            </a:blip>
+            <a:stretch>
+              <a:fillRect/>
+            </a:stretch>
+          </p:blipFill>
+          <p:spPr>
+            <a:xfrm>
+              <a:off x="645391" y="1738725"/>
+              <a:ext cx="5025737" cy="3917118"/>
+            </a:xfrm>
+            <a:prstGeom prst="rect">
+              <a:avLst/>
+            </a:prstGeom>
+            <a:ln w="38100">
+              <a:solidFill>
+                <a:srgbClr val="FF0000"/>
+              </a:solidFill>
+            </a:ln>
+          </p:spPr>
+        </p:pic>
+        <p:sp>
+          <p:nvSpPr>
+            <p:cNvPr id="4" name="文本框 3">
+              <a:extLst>
+                <a:ext uri="{FF2B5EF4-FFF2-40B4-BE49-F238E27FC236}">
+                  <a16:creationId xmlns:a16="http://schemas.microsoft.com/office/drawing/2014/main" id="{74BCB61C-CC31-4ADA-7821-0350B19D5055}"/>
+                </a:ext>
+              </a:extLst>
+            </p:cNvPr>
+            <p:cNvSpPr txBox="1"/>
+            <p:nvPr/>
+          </p:nvSpPr>
+          <p:spPr>
+            <a:xfrm>
+              <a:off x="2115265" y="5834766"/>
+              <a:ext cx="2085988" cy="400110"/>
+            </a:xfrm>
+            <a:prstGeom prst="rect">
+              <a:avLst/>
+            </a:prstGeom>
+            <a:noFill/>
+          </p:spPr>
+          <p:txBody>
+            <a:bodyPr wrap="square" rtlCol="0">
+              <a:spAutoFit/>
+            </a:bodyPr>
+            <a:lstStyle/>
+            <a:p>
+              <a:r>
+                <a:rPr lang="en-US" altLang="zh-CN" sz="2000" b="1" dirty="0">
+                  <a:solidFill>
+                    <a:srgbClr val="FF0000"/>
+                  </a:solidFill>
+                  <a:latin typeface="微软雅黑" panose="020B0503020204020204" pitchFamily="34" charset="-122"/>
+                  <a:ea typeface="微软雅黑" panose="020B0503020204020204" pitchFamily="34" charset="-122"/>
+                </a:rPr>
+                <a:t>Original image</a:t>
+              </a:r>
+              <a:endParaRPr lang="zh-CN" altLang="en-US" sz="2000" b="1" dirty="0">
+                <a:solidFill>
+                  <a:srgbClr val="FF0000"/>
+                </a:solidFill>
+                <a:latin typeface="微软雅黑" panose="020B0503020204020204" pitchFamily="34" charset="-122"/>
+                <a:ea typeface="微软雅黑" panose="020B0503020204020204" pitchFamily="34" charset="-122"/>
+              </a:endParaRPr>
+            </a:p>
+          </p:txBody>
+        </p:sp>
+      </p:grpSp>
+      <p:sp>
+        <p:nvSpPr>
+          <p:cNvPr id="8" name="右箭头 12">
+            <a:extLst>
+              <a:ext uri="{FF2B5EF4-FFF2-40B4-BE49-F238E27FC236}">
+                <a16:creationId xmlns:a16="http://schemas.microsoft.com/office/drawing/2014/main" id="{8B05285B-23D5-8C5F-55A8-FD6ACEE429C4}"/>
+              </a:ext>
+            </a:extLst>
+          </p:cNvPr>
+          <p:cNvSpPr/>
+          <p:nvPr/>
+        </p:nvSpPr>
+        <p:spPr>
+          <a:xfrm>
+            <a:off x="5971933" y="3444332"/>
+            <a:ext cx="652613" cy="505904"/>
+          </a:xfrm>
+          <a:prstGeom prst="rightArrow">
+            <a:avLst/>
+          </a:prstGeom>
+          <a:solidFill>
+            <a:srgbClr val="43AB54"/>
+          </a:solidFill>
+          <a:ln>
+            <a:solidFill>
+              <a:srgbClr val="00B050"/>
+            </a:solidFill>
+          </a:ln>
+        </p:spPr>
+        <p:style>
+          <a:lnRef idx="2">
+            <a:schemeClr val="accent1">
+              <a:lumMod val="75000"/>
+            </a:schemeClr>
+          </a:lnRef>
+          <a:fillRef idx="1">
+            <a:schemeClr val="accent1"/>
+          </a:fillRef>
+          <a:effectRef idx="0">
+            <a:srgbClr val="FFFFFF"/>
+          </a:effectRef>
+          <a:fontRef idx="minor">
+            <a:schemeClr val="lt1"/>
+          </a:fontRef>
+        </p:style>
+        <p:txBody>
+          <a:bodyPr rtlCol="0" anchor="ctr"/>
+          <a:lstStyle/>
+          <a:p>
+            <a:pPr algn="ctr"/>
+            <a:endParaRPr lang="zh-CN" altLang="en-US"/>
+          </a:p>
+        </p:txBody>
+      </p:sp>
+      <p:grpSp>
+        <p:nvGrpSpPr>
+          <p:cNvPr id="9" name="组合 8">
+            <a:extLst>
+              <a:ext uri="{FF2B5EF4-FFF2-40B4-BE49-F238E27FC236}">
+                <a16:creationId xmlns:a16="http://schemas.microsoft.com/office/drawing/2014/main" id="{FD483B37-DFD8-A83C-611B-16324C4437B8}"/>
+              </a:ext>
+            </a:extLst>
+          </p:cNvPr>
+          <p:cNvGrpSpPr/>
+          <p:nvPr/>
+        </p:nvGrpSpPr>
+        <p:grpSpPr>
+          <a:xfrm>
+            <a:off x="6839002" y="1734451"/>
+            <a:ext cx="4677617" cy="4501137"/>
+            <a:chOff x="6839002" y="1734451"/>
+            <a:chExt cx="4677617" cy="4501137"/>
+          </a:xfrm>
+        </p:grpSpPr>
+        <p:pic>
+          <p:nvPicPr>
+            <p:cNvPr id="10" name="图片 9" descr="蓝色的标志&#10;&#10;描述已自动生成">
+              <a:extLst>
+                <a:ext uri="{FF2B5EF4-FFF2-40B4-BE49-F238E27FC236}">
+                  <a16:creationId xmlns:a16="http://schemas.microsoft.com/office/drawing/2014/main" id="{16633957-B89B-492D-4110-E310DB00B828}"/>
+                </a:ext>
+              </a:extLst>
+            </p:cNvPr>
+            <p:cNvPicPr>
+              <a:picLocks noChangeAspect="1"/>
+            </p:cNvPicPr>
+            <p:nvPr/>
+          </p:nvPicPr>
+          <p:blipFill>
+            <a:blip r:embed="rId4">
+              <a:extLst>
+                <a:ext uri="{28A0092B-C50C-407E-A947-70E740481C1C}">
+                  <a14:useLocalDpi xmlns:a14="http://schemas.microsoft.com/office/drawing/2010/main" val="0"/>
+                </a:ext>
+              </a:extLst>
+            </a:blip>
+            <a:stretch>
+              <a:fillRect/>
+            </a:stretch>
+          </p:blipFill>
+          <p:spPr>
+            <a:xfrm>
+              <a:off x="6839002" y="1734451"/>
+              <a:ext cx="4677617" cy="3921392"/>
+            </a:xfrm>
+            <a:prstGeom prst="rect">
+              <a:avLst/>
+            </a:prstGeom>
+            <a:ln w="38100">
+              <a:solidFill>
+                <a:srgbClr val="FF0000"/>
+              </a:solidFill>
+            </a:ln>
+          </p:spPr>
+        </p:pic>
+        <p:sp>
+          <p:nvSpPr>
+            <p:cNvPr id="11" name="文本框 10">
+              <a:extLst>
+                <a:ext uri="{FF2B5EF4-FFF2-40B4-BE49-F238E27FC236}">
+                  <a16:creationId xmlns:a16="http://schemas.microsoft.com/office/drawing/2014/main" id="{33DAFC01-B858-0772-6817-ABAFA378A7DC}"/>
+                </a:ext>
+              </a:extLst>
+            </p:cNvPr>
+            <p:cNvSpPr txBox="1"/>
+            <p:nvPr/>
+          </p:nvSpPr>
+          <p:spPr>
+            <a:xfrm>
+              <a:off x="8017436" y="5835478"/>
+              <a:ext cx="2320748" cy="400110"/>
+            </a:xfrm>
+            <a:prstGeom prst="rect">
+              <a:avLst/>
+            </a:prstGeom>
+            <a:noFill/>
+          </p:spPr>
+          <p:txBody>
+            <a:bodyPr wrap="square" rtlCol="0">
+              <a:spAutoFit/>
+            </a:bodyPr>
+            <a:lstStyle/>
+            <a:p>
+              <a:r>
+                <a:rPr lang="en-US" altLang="zh-CN" sz="2000" b="1" dirty="0">
+                  <a:solidFill>
+                    <a:srgbClr val="FF0000"/>
+                  </a:solidFill>
+                  <a:latin typeface="微软雅黑" panose="020B0503020204020204" pitchFamily="34" charset="-122"/>
+                  <a:ea typeface="微软雅黑" panose="020B0503020204020204" pitchFamily="34" charset="-122"/>
+                </a:rPr>
+                <a:t>Detected Image</a:t>
+              </a:r>
+              <a:endParaRPr lang="zh-CN" altLang="en-US" sz="2000" b="1" dirty="0">
+                <a:solidFill>
+                  <a:srgbClr val="FF0000"/>
+                </a:solidFill>
+                <a:latin typeface="微软雅黑" panose="020B0503020204020204" pitchFamily="34" charset="-122"/>
+                <a:ea typeface="微软雅黑" panose="020B0503020204020204" pitchFamily="34" charset="-122"/>
+              </a:endParaRPr>
+            </a:p>
+          </p:txBody>
+        </p:sp>
+      </p:grpSp>
+    </p:spTree>
+    <p:extLst>
+      <p:ext uri="{BB962C8B-B14F-4D97-AF65-F5344CB8AC3E}">
+        <p14:creationId xmlns:p14="http://schemas.microsoft.com/office/powerpoint/2010/main" val="3776509583"/>
+      </p:ext>
+    </p:extLst>
+  </p:cSld>
+  <p:clrMapOvr>
+    <a:masterClrMapping/>
+  </p:clrMapOvr>
+  <p:timing>
+    <p:tnLst>
+      <p:par>
+        <p:cTn id="1" dur="indefinite" restart="never" nodeType="tmRoot">
+          <p:childTnLst>
+            <p:seq concurrent="1" nextAc="seek">
+              <p:cTn id="2" dur="indefinite" nodeType="mainSeq">
+                <p:childTnLst>
+                  <p:par>
+                    <p:cTn id="3" fill="hold">
+                      <p:stCondLst>
+                        <p:cond delay="indefinite"/>
+                      </p:stCondLst>
+                      <p:childTnLst>
+                        <p:par>
+                          <p:cTn id="4" fill="hold">
+                            <p:stCondLst>
+                              <p:cond delay="0"/>
+                            </p:stCondLst>
+                            <p:childTnLst>
+                              <p:par>
+                                <p:cTn id="5" presetID="2" presetClass="entr" presetSubtype="4" fill="hold" nodeType="clickEffect">
+                                  <p:stCondLst>
+                                    <p:cond delay="0"/>
+                                  </p:stCondLst>
+                                  <p:childTnLst>
+                                    <p:set>
+                                      <p:cBhvr>
+                                        <p:cTn id="6" dur="1" fill="hold">
+                                          <p:stCondLst>
+                                            <p:cond delay="0"/>
+                                          </p:stCondLst>
+                                        </p:cTn>
+                                        <p:tgtEl>
+                                          <p:spTgt spid="2"/>
+                                        </p:tgtEl>
+                                        <p:attrNameLst>
+                                          <p:attrName>style.visibility</p:attrName>
+                                        </p:attrNameLst>
+                                      </p:cBhvr>
+                                      <p:to>
+                                        <p:strVal val="visible"/>
+                                      </p:to>
+                                    </p:set>
+                                    <p:anim calcmode="lin" valueType="num">
+                                      <p:cBhvr additive="base">
+                                        <p:cTn id="7" dur="500" fill="hold"/>
+                                        <p:tgtEl>
+                                          <p:spTgt spid="2"/>
+                                        </p:tgtEl>
+                                        <p:attrNameLst>
+                                          <p:attrName>ppt_x</p:attrName>
+                                        </p:attrNameLst>
+                                      </p:cBhvr>
+                                      <p:tavLst>
+                                        <p:tav tm="0">
+                                          <p:val>
+                                            <p:strVal val="#ppt_x"/>
+                                          </p:val>
+                                        </p:tav>
+                                        <p:tav tm="100000">
+                                          <p:val>
+                                            <p:strVal val="#ppt_x"/>
+                                          </p:val>
+                                        </p:tav>
+                                      </p:tavLst>
+                                    </p:anim>
+                                    <p:anim calcmode="lin" valueType="num">
+                                      <p:cBhvr additive="base">
+                                        <p:cTn id="8" dur="500" fill="hold"/>
+                                        <p:tgtEl>
+                                          <p:spTgt spid="2"/>
+                                        </p:tgtEl>
+                                        <p:attrNameLst>
+                                          <p:attrName>ppt_y</p:attrName>
+                                        </p:attrNameLst>
+                                      </p:cBhvr>
+                                      <p:tavLst>
+                                        <p:tav tm="0">
+                                          <p:val>
+                                            <p:strVal val="1+#ppt_h/2"/>
+                                          </p:val>
+                                        </p:tav>
+                                        <p:tav tm="100000">
+                                          <p:val>
+                                            <p:strVal val="#ppt_y"/>
+                                          </p:val>
+                                        </p:tav>
+                                      </p:tavLst>
+                                    </p:anim>
+                                  </p:childTnLst>
+                                </p:cTn>
+                              </p:par>
+                            </p:childTnLst>
+                          </p:cTn>
+                        </p:par>
+                      </p:childTnLst>
+                    </p:cTn>
+                  </p:par>
+                  <p:par>
+                    <p:cTn id="9" fill="hold">
+                      <p:stCondLst>
+                        <p:cond delay="indefinite"/>
+                      </p:stCondLst>
+                      <p:childTnLst>
+                        <p:par>
+                          <p:cTn id="10" fill="hold">
+                            <p:stCondLst>
+                              <p:cond delay="0"/>
+                            </p:stCondLst>
+                            <p:childTnLst>
+                              <p:par>
+                                <p:cTn id="11" presetID="2" presetClass="entr" presetSubtype="4" fill="hold" grpId="0" nodeType="clickEffect">
+                                  <p:stCondLst>
+                                    <p:cond delay="0"/>
+                                  </p:stCondLst>
+                                  <p:childTnLst>
+                                    <p:set>
+                                      <p:cBhvr>
+                                        <p:cTn id="12" dur="1" fill="hold">
+                                          <p:stCondLst>
+                                            <p:cond delay="0"/>
+                                          </p:stCondLst>
+                                        </p:cTn>
+                                        <p:tgtEl>
+                                          <p:spTgt spid="8"/>
+                                        </p:tgtEl>
+                                        <p:attrNameLst>
+                                          <p:attrName>style.visibility</p:attrName>
+                                        </p:attrNameLst>
+                                      </p:cBhvr>
+                                      <p:to>
+                                        <p:strVal val="visible"/>
+                                      </p:to>
+                                    </p:set>
+                                    <p:anim calcmode="lin" valueType="num">
+                                      <p:cBhvr additive="base">
+                                        <p:cTn id="13" dur="500" fill="hold"/>
+                                        <p:tgtEl>
+                                          <p:spTgt spid="8"/>
+                                        </p:tgtEl>
+                                        <p:attrNameLst>
+                                          <p:attrName>ppt_x</p:attrName>
+                                        </p:attrNameLst>
+                                      </p:cBhvr>
+                                      <p:tavLst>
+                                        <p:tav tm="0">
+                                          <p:val>
+                                            <p:strVal val="#ppt_x"/>
+                                          </p:val>
+                                        </p:tav>
+                                        <p:tav tm="100000">
+                                          <p:val>
+                                            <p:strVal val="#ppt_x"/>
+                                          </p:val>
+                                        </p:tav>
+                                      </p:tavLst>
+                                    </p:anim>
+                                    <p:anim calcmode="lin" valueType="num">
+                                      <p:cBhvr additive="base">
+                                        <p:cTn id="14" dur="500" fill="hold"/>
+                                        <p:tgtEl>
+                                          <p:spTgt spid="8"/>
+                                        </p:tgtEl>
+                                        <p:attrNameLst>
+                                          <p:attrName>ppt_y</p:attrName>
+                                        </p:attrNameLst>
+                                      </p:cBhvr>
+                                      <p:tavLst>
+                                        <p:tav tm="0">
+                                          <p:val>
+                                            <p:strVal val="1+#ppt_h/2"/>
+                                          </p:val>
+                                        </p:tav>
+                                        <p:tav tm="100000">
+                                          <p:val>
+                                            <p:strVal val="#ppt_y"/>
+                                          </p:val>
+                                        </p:tav>
+                                      </p:tavLst>
+                                    </p:anim>
+                                  </p:childTnLst>
+                                </p:cTn>
+                              </p:par>
+                            </p:childTnLst>
+                          </p:cTn>
+                        </p:par>
+                      </p:childTnLst>
+                    </p:cTn>
+                  </p:par>
+                  <p:par>
+                    <p:cTn id="15" fill="hold">
+                      <p:stCondLst>
+                        <p:cond delay="indefinite"/>
+                      </p:stCondLst>
+                      <p:childTnLst>
+                        <p:par>
+                          <p:cTn id="16" fill="hold">
+                            <p:stCondLst>
+                              <p:cond delay="0"/>
+                            </p:stCondLst>
+                            <p:childTnLst>
+                              <p:par>
+                                <p:cTn id="17" presetID="2" presetClass="entr" presetSubtype="4" fill="hold" nodeType="clickEffect">
+                                  <p:stCondLst>
+                                    <p:cond delay="0"/>
+                                  </p:stCondLst>
+                                  <p:childTnLst>
+                                    <p:set>
+                                      <p:cBhvr>
+                                        <p:cTn id="18" dur="1" fill="hold">
+                                          <p:stCondLst>
+                                            <p:cond delay="0"/>
+                                          </p:stCondLst>
+                                        </p:cTn>
+                                        <p:tgtEl>
+                                          <p:spTgt spid="9"/>
+                                        </p:tgtEl>
+                                        <p:attrNameLst>
+                                          <p:attrName>style.visibility</p:attrName>
+                                        </p:attrNameLst>
+                                      </p:cBhvr>
+                                      <p:to>
+                                        <p:strVal val="visible"/>
+                                      </p:to>
+                                    </p:set>
+                                    <p:anim calcmode="lin" valueType="num">
+                                      <p:cBhvr additive="base">
+                                        <p:cTn id="19" dur="500" fill="hold"/>
+                                        <p:tgtEl>
+                                          <p:spTgt spid="9"/>
+                                        </p:tgtEl>
+                                        <p:attrNameLst>
+                                          <p:attrName>ppt_x</p:attrName>
+                                        </p:attrNameLst>
+                                      </p:cBhvr>
+                                      <p:tavLst>
+                                        <p:tav tm="0">
+                                          <p:val>
+                                            <p:strVal val="#ppt_x"/>
+                                          </p:val>
+                                        </p:tav>
+                                        <p:tav tm="100000">
+                                          <p:val>
+                                            <p:strVal val="#ppt_x"/>
+                                          </p:val>
+                                        </p:tav>
+                                      </p:tavLst>
+                                    </p:anim>
+                                    <p:anim calcmode="lin" valueType="num">
+                                      <p:cBhvr additive="base">
+                                        <p:cTn id="20" dur="500" fill="hold"/>
+                                        <p:tgtEl>
+                                          <p:spTgt spid="9"/>
+                                        </p:tgtEl>
+                                        <p:attrNameLst>
+                                          <p:attrName>ppt_y</p:attrName>
+                                        </p:attrNameLst>
+                                      </p:cBhvr>
+                                      <p:tavLst>
+                                        <p:tav tm="0">
+                                          <p:val>
+                                            <p:strVal val="1+#ppt_h/2"/>
+                                          </p:val>
+                                        </p:tav>
+                                        <p:tav tm="100000">
+                                          <p:val>
+                                            <p:strVal val="#ppt_y"/>
+                                          </p:val>
+                                        </p:tav>
+                                      </p:tavLst>
+                                    </p:anim>
+                                  </p:childTnLst>
+                                </p:cTn>
+                              </p:par>
+                            </p:childTnLst>
+                          </p:cTn>
+                        </p:par>
+                      </p:childTnLst>
+                    </p:cTn>
+                  </p:par>
+                </p:childTnLst>
+              </p:cTn>
+              <p:prevCondLst>
+                <p:cond evt="onPrev" delay="0">
+                  <p:tgtEl>
+                    <p:sldTgt/>
+                  </p:tgtEl>
+                </p:cond>
+              </p:prevCondLst>
+              <p:nextCondLst>
+                <p:cond evt="onNext" delay="0">
+                  <p:tgtEl>
+                    <p:sldTgt/>
+                  </p:tgtEl>
+                </p:cond>
+              </p:nextCondLst>
+            </p:seq>
+          </p:childTnLst>
+        </p:cTn>
+      </p:par>
+    </p:tnLst>
+    <p:bldLst>
+      <p:bldP spid="8" grpId="0" animBg="1"/>
+    </p:bldLst>
+  </p:timing>
+</p:sld>
+</file>
+
+<file path=ppt/slides/slide3.xml><?xml version="1.0" encoding="utf-8"?>
+<p:sld xmlns:a="http://schemas.openxmlformats.org/drawingml/2006/main" xmlns:r="http://schemas.openxmlformats.org/officeDocument/2006/relationships" xmlns:p="http://schemas.openxmlformats.org/presentationml/2006/main">
+  <p:cSld>
+    <p:spTree>
+      <p:nvGrpSpPr>
+        <p:cNvPr id="1" name=""/>
+        <p:cNvGrpSpPr/>
+        <p:nvPr/>
+      </p:nvGrpSpPr>
+      <p:grpSpPr>
+        <a:xfrm>
+          <a:off x="0" y="0"/>
+          <a:ext cx="0" cy="0"/>
+          <a:chOff x="0" y="0"/>
+          <a:chExt cx="0" cy="0"/>
+        </a:xfrm>
+      </p:grpSpPr>
+      <p:grpSp>
+        <p:nvGrpSpPr>
           <p:cNvPr id="79" name="组合 78">
             <a:extLst>
               <a:ext uri="{FF2B5EF4-FFF2-40B4-BE49-F238E27FC236}">
@@ -4460,734 +5188,6 @@
 </p:sld>
 </file>
 
-<file path=ppt/slides/slide3.xml><?xml version="1.0" encoding="utf-8"?>
-<p:sld xmlns:a="http://schemas.openxmlformats.org/drawingml/2006/main" xmlns:r="http://schemas.openxmlformats.org/officeDocument/2006/relationships" xmlns:p="http://schemas.openxmlformats.org/presentationml/2006/main">
-  <p:cSld>
-    <p:spTree>
-      <p:nvGrpSpPr>
-        <p:cNvPr id="1" name=""/>
-        <p:cNvGrpSpPr/>
-        <p:nvPr/>
-      </p:nvGrpSpPr>
-      <p:grpSpPr>
-        <a:xfrm>
-          <a:off x="0" y="0"/>
-          <a:ext cx="0" cy="0"/>
-          <a:chOff x="0" y="0"/>
-          <a:chExt cx="0" cy="0"/>
-        </a:xfrm>
-      </p:grpSpPr>
-      <p:grpSp>
-        <p:nvGrpSpPr>
-          <p:cNvPr id="5" name="组合 4">
-            <a:extLst>
-              <a:ext uri="{FF2B5EF4-FFF2-40B4-BE49-F238E27FC236}">
-                <a16:creationId xmlns:a16="http://schemas.microsoft.com/office/drawing/2014/main" id="{79DEFE29-5B6B-8DE1-28D6-EC59310C3935}"/>
-              </a:ext>
-            </a:extLst>
-          </p:cNvPr>
-          <p:cNvGrpSpPr/>
-          <p:nvPr/>
-        </p:nvGrpSpPr>
-        <p:grpSpPr>
-          <a:xfrm>
-            <a:off x="487218" y="823179"/>
-            <a:ext cx="8875320" cy="369332"/>
-            <a:chOff x="470561" y="949180"/>
-            <a:chExt cx="8875320" cy="369332"/>
-          </a:xfrm>
-        </p:grpSpPr>
-        <p:pic>
-          <p:nvPicPr>
-            <p:cNvPr id="6" name="图片 5">
-              <a:extLst>
-                <a:ext uri="{FF2B5EF4-FFF2-40B4-BE49-F238E27FC236}">
-                  <a16:creationId xmlns:a16="http://schemas.microsoft.com/office/drawing/2014/main" id="{2287952E-1495-E129-8136-418B1DE9C9A5}"/>
-                </a:ext>
-              </a:extLst>
-            </p:cNvPr>
-            <p:cNvPicPr>
-              <a:picLocks noChangeAspect="1"/>
-            </p:cNvPicPr>
-            <p:nvPr/>
-          </p:nvPicPr>
-          <p:blipFill>
-            <a:blip r:embed="rId2">
-              <a:extLst>
-                <a:ext uri="{28A0092B-C50C-407E-A947-70E740481C1C}">
-                  <a14:useLocalDpi xmlns:a14="http://schemas.microsoft.com/office/drawing/2010/main" val="0"/>
-                </a:ext>
-              </a:extLst>
-            </a:blip>
-            <a:stretch>
-              <a:fillRect/>
-            </a:stretch>
-          </p:blipFill>
-          <p:spPr>
-            <a:xfrm>
-              <a:off x="470561" y="962396"/>
-              <a:ext cx="342900" cy="342900"/>
-            </a:xfrm>
-            <a:prstGeom prst="rect">
-              <a:avLst/>
-            </a:prstGeom>
-          </p:spPr>
-        </p:pic>
-        <p:sp>
-          <p:nvSpPr>
-            <p:cNvPr id="7" name="文本框 6">
-              <a:extLst>
-                <a:ext uri="{FF2B5EF4-FFF2-40B4-BE49-F238E27FC236}">
-                  <a16:creationId xmlns:a16="http://schemas.microsoft.com/office/drawing/2014/main" id="{E6FF3A55-6C0A-26EE-49B7-AD0F4B00BC31}"/>
-                </a:ext>
-              </a:extLst>
-            </p:cNvPr>
-            <p:cNvSpPr txBox="1"/>
-            <p:nvPr/>
-          </p:nvSpPr>
-          <p:spPr>
-            <a:xfrm>
-              <a:off x="813461" y="949180"/>
-              <a:ext cx="8532420" cy="369332"/>
-            </a:xfrm>
-            <a:prstGeom prst="rect">
-              <a:avLst/>
-            </a:prstGeom>
-            <a:noFill/>
-          </p:spPr>
-          <p:txBody>
-            <a:bodyPr wrap="square" rtlCol="0" anchor="t">
-              <a:spAutoFit/>
-            </a:bodyPr>
-            <a:lstStyle/>
-            <a:p>
-              <a:r>
-                <a:rPr lang="zh-CN" altLang="en-US" dirty="0">
-                  <a:solidFill>
-                    <a:srgbClr val="0070C0"/>
-                  </a:solidFill>
-                  <a:latin typeface="微软雅黑" panose="020B0503020204020204" charset="-122"/>
-                  <a:ea typeface="微软雅黑" panose="020B0503020204020204" charset="-122"/>
-                  <a:sym typeface="+mn-ea"/>
-                </a:rPr>
-                <a:t>芯片检测演示 </a:t>
-              </a:r>
-              <a:r>
-                <a:rPr lang="en-US" altLang="zh-CN" dirty="0">
-                  <a:solidFill>
-                    <a:srgbClr val="0070C0"/>
-                  </a:solidFill>
-                  <a:latin typeface="微软雅黑" panose="020B0503020204020204" charset="-122"/>
-                  <a:ea typeface="微软雅黑" panose="020B0503020204020204" charset="-122"/>
-                  <a:sym typeface="+mn-ea"/>
-                </a:rPr>
-                <a:t>| Chip detection demonstration</a:t>
-              </a:r>
-              <a:endParaRPr lang="zh-CN" altLang="en-US" dirty="0">
-                <a:solidFill>
-                  <a:srgbClr val="FF0000"/>
-                </a:solidFill>
-                <a:latin typeface="微软雅黑" panose="020B0503020204020204" charset="-122"/>
-                <a:ea typeface="微软雅黑" panose="020B0503020204020204" charset="-122"/>
-                <a:sym typeface="+mn-ea"/>
-              </a:endParaRPr>
-            </a:p>
-          </p:txBody>
-        </p:sp>
-      </p:grpSp>
-      <p:grpSp>
-        <p:nvGrpSpPr>
-          <p:cNvPr id="2" name="组合 1">
-            <a:extLst>
-              <a:ext uri="{FF2B5EF4-FFF2-40B4-BE49-F238E27FC236}">
-                <a16:creationId xmlns:a16="http://schemas.microsoft.com/office/drawing/2014/main" id="{F5B3DDD8-16CE-339D-38AA-BD8707A07CD3}"/>
-              </a:ext>
-            </a:extLst>
-          </p:cNvPr>
-          <p:cNvGrpSpPr/>
-          <p:nvPr/>
-        </p:nvGrpSpPr>
-        <p:grpSpPr>
-          <a:xfrm>
-            <a:off x="645391" y="1738725"/>
-            <a:ext cx="5025737" cy="4496151"/>
-            <a:chOff x="645391" y="1738725"/>
-            <a:chExt cx="5025737" cy="4496151"/>
-          </a:xfrm>
-        </p:grpSpPr>
-        <p:pic>
-          <p:nvPicPr>
-            <p:cNvPr id="3" name="图片 2" descr="图标&#10;&#10;描述已自动生成">
-              <a:extLst>
-                <a:ext uri="{FF2B5EF4-FFF2-40B4-BE49-F238E27FC236}">
-                  <a16:creationId xmlns:a16="http://schemas.microsoft.com/office/drawing/2014/main" id="{8163A0C7-E267-CEBA-6E48-9022EC24364E}"/>
-                </a:ext>
-              </a:extLst>
-            </p:cNvPr>
-            <p:cNvPicPr>
-              <a:picLocks noChangeAspect="1"/>
-            </p:cNvPicPr>
-            <p:nvPr/>
-          </p:nvPicPr>
-          <p:blipFill>
-            <a:blip r:embed="rId3">
-              <a:extLst>
-                <a:ext uri="{28A0092B-C50C-407E-A947-70E740481C1C}">
-                  <a14:useLocalDpi xmlns:a14="http://schemas.microsoft.com/office/drawing/2010/main" val="0"/>
-                </a:ext>
-              </a:extLst>
-            </a:blip>
-            <a:stretch>
-              <a:fillRect/>
-            </a:stretch>
-          </p:blipFill>
-          <p:spPr>
-            <a:xfrm>
-              <a:off x="645391" y="1738725"/>
-              <a:ext cx="5025737" cy="3917118"/>
-            </a:xfrm>
-            <a:prstGeom prst="rect">
-              <a:avLst/>
-            </a:prstGeom>
-            <a:ln w="38100">
-              <a:solidFill>
-                <a:srgbClr val="FF0000"/>
-              </a:solidFill>
-            </a:ln>
-          </p:spPr>
-        </p:pic>
-        <p:sp>
-          <p:nvSpPr>
-            <p:cNvPr id="4" name="文本框 3">
-              <a:extLst>
-                <a:ext uri="{FF2B5EF4-FFF2-40B4-BE49-F238E27FC236}">
-                  <a16:creationId xmlns:a16="http://schemas.microsoft.com/office/drawing/2014/main" id="{74BCB61C-CC31-4ADA-7821-0350B19D5055}"/>
-                </a:ext>
-              </a:extLst>
-            </p:cNvPr>
-            <p:cNvSpPr txBox="1"/>
-            <p:nvPr/>
-          </p:nvSpPr>
-          <p:spPr>
-            <a:xfrm>
-              <a:off x="2115265" y="5834766"/>
-              <a:ext cx="2085988" cy="400110"/>
-            </a:xfrm>
-            <a:prstGeom prst="rect">
-              <a:avLst/>
-            </a:prstGeom>
-            <a:noFill/>
-          </p:spPr>
-          <p:txBody>
-            <a:bodyPr wrap="square" rtlCol="0">
-              <a:spAutoFit/>
-            </a:bodyPr>
-            <a:lstStyle/>
-            <a:p>
-              <a:r>
-                <a:rPr lang="en-US" altLang="zh-CN" sz="2000" b="1" dirty="0">
-                  <a:solidFill>
-                    <a:srgbClr val="FF0000"/>
-                  </a:solidFill>
-                  <a:latin typeface="微软雅黑" panose="020B0503020204020204" pitchFamily="34" charset="-122"/>
-                  <a:ea typeface="微软雅黑" panose="020B0503020204020204" pitchFamily="34" charset="-122"/>
-                </a:rPr>
-                <a:t>Original image</a:t>
-              </a:r>
-              <a:endParaRPr lang="zh-CN" altLang="en-US" sz="2000" b="1" dirty="0">
-                <a:solidFill>
-                  <a:srgbClr val="FF0000"/>
-                </a:solidFill>
-                <a:latin typeface="微软雅黑" panose="020B0503020204020204" pitchFamily="34" charset="-122"/>
-                <a:ea typeface="微软雅黑" panose="020B0503020204020204" pitchFamily="34" charset="-122"/>
-              </a:endParaRPr>
-            </a:p>
-          </p:txBody>
-        </p:sp>
-      </p:grpSp>
-      <p:sp>
-        <p:nvSpPr>
-          <p:cNvPr id="8" name="右箭头 12">
-            <a:extLst>
-              <a:ext uri="{FF2B5EF4-FFF2-40B4-BE49-F238E27FC236}">
-                <a16:creationId xmlns:a16="http://schemas.microsoft.com/office/drawing/2014/main" id="{8B05285B-23D5-8C5F-55A8-FD6ACEE429C4}"/>
-              </a:ext>
-            </a:extLst>
-          </p:cNvPr>
-          <p:cNvSpPr/>
-          <p:nvPr/>
-        </p:nvSpPr>
-        <p:spPr>
-          <a:xfrm>
-            <a:off x="5971933" y="3444332"/>
-            <a:ext cx="652613" cy="505904"/>
-          </a:xfrm>
-          <a:prstGeom prst="rightArrow">
-            <a:avLst/>
-          </a:prstGeom>
-          <a:solidFill>
-            <a:srgbClr val="43AB54"/>
-          </a:solidFill>
-          <a:ln>
-            <a:solidFill>
-              <a:srgbClr val="00B050"/>
-            </a:solidFill>
-          </a:ln>
-        </p:spPr>
-        <p:style>
-          <a:lnRef idx="2">
-            <a:schemeClr val="accent1">
-              <a:lumMod val="75000"/>
-            </a:schemeClr>
-          </a:lnRef>
-          <a:fillRef idx="1">
-            <a:schemeClr val="accent1"/>
-          </a:fillRef>
-          <a:effectRef idx="0">
-            <a:srgbClr val="FFFFFF"/>
-          </a:effectRef>
-          <a:fontRef idx="minor">
-            <a:schemeClr val="lt1"/>
-          </a:fontRef>
-        </p:style>
-        <p:txBody>
-          <a:bodyPr rtlCol="0" anchor="ctr"/>
-          <a:lstStyle/>
-          <a:p>
-            <a:pPr algn="ctr"/>
-            <a:endParaRPr lang="zh-CN" altLang="en-US"/>
-          </a:p>
-        </p:txBody>
-      </p:sp>
-      <p:grpSp>
-        <p:nvGrpSpPr>
-          <p:cNvPr id="9" name="组合 8">
-            <a:extLst>
-              <a:ext uri="{FF2B5EF4-FFF2-40B4-BE49-F238E27FC236}">
-                <a16:creationId xmlns:a16="http://schemas.microsoft.com/office/drawing/2014/main" id="{FD483B37-DFD8-A83C-611B-16324C4437B8}"/>
-              </a:ext>
-            </a:extLst>
-          </p:cNvPr>
-          <p:cNvGrpSpPr/>
-          <p:nvPr/>
-        </p:nvGrpSpPr>
-        <p:grpSpPr>
-          <a:xfrm>
-            <a:off x="6839002" y="1734451"/>
-            <a:ext cx="4677617" cy="4501137"/>
-            <a:chOff x="6839002" y="1734451"/>
-            <a:chExt cx="4677617" cy="4501137"/>
-          </a:xfrm>
-        </p:grpSpPr>
-        <p:pic>
-          <p:nvPicPr>
-            <p:cNvPr id="10" name="图片 9" descr="蓝色的标志&#10;&#10;描述已自动生成">
-              <a:extLst>
-                <a:ext uri="{FF2B5EF4-FFF2-40B4-BE49-F238E27FC236}">
-                  <a16:creationId xmlns:a16="http://schemas.microsoft.com/office/drawing/2014/main" id="{16633957-B89B-492D-4110-E310DB00B828}"/>
-                </a:ext>
-              </a:extLst>
-            </p:cNvPr>
-            <p:cNvPicPr>
-              <a:picLocks noChangeAspect="1"/>
-            </p:cNvPicPr>
-            <p:nvPr/>
-          </p:nvPicPr>
-          <p:blipFill>
-            <a:blip r:embed="rId4">
-              <a:extLst>
-                <a:ext uri="{28A0092B-C50C-407E-A947-70E740481C1C}">
-                  <a14:useLocalDpi xmlns:a14="http://schemas.microsoft.com/office/drawing/2010/main" val="0"/>
-                </a:ext>
-              </a:extLst>
-            </a:blip>
-            <a:stretch>
-              <a:fillRect/>
-            </a:stretch>
-          </p:blipFill>
-          <p:spPr>
-            <a:xfrm>
-              <a:off x="6839002" y="1734451"/>
-              <a:ext cx="4677617" cy="3921392"/>
-            </a:xfrm>
-            <a:prstGeom prst="rect">
-              <a:avLst/>
-            </a:prstGeom>
-            <a:ln w="38100">
-              <a:solidFill>
-                <a:srgbClr val="FF0000"/>
-              </a:solidFill>
-            </a:ln>
-          </p:spPr>
-        </p:pic>
-        <p:sp>
-          <p:nvSpPr>
-            <p:cNvPr id="11" name="文本框 10">
-              <a:extLst>
-                <a:ext uri="{FF2B5EF4-FFF2-40B4-BE49-F238E27FC236}">
-                  <a16:creationId xmlns:a16="http://schemas.microsoft.com/office/drawing/2014/main" id="{33DAFC01-B858-0772-6817-ABAFA378A7DC}"/>
-                </a:ext>
-              </a:extLst>
-            </p:cNvPr>
-            <p:cNvSpPr txBox="1"/>
-            <p:nvPr/>
-          </p:nvSpPr>
-          <p:spPr>
-            <a:xfrm>
-              <a:off x="8017436" y="5835478"/>
-              <a:ext cx="2320748" cy="400110"/>
-            </a:xfrm>
-            <a:prstGeom prst="rect">
-              <a:avLst/>
-            </a:prstGeom>
-            <a:noFill/>
-          </p:spPr>
-          <p:txBody>
-            <a:bodyPr wrap="square" rtlCol="0">
-              <a:spAutoFit/>
-            </a:bodyPr>
-            <a:lstStyle/>
-            <a:p>
-              <a:r>
-                <a:rPr lang="en-US" altLang="zh-CN" sz="2000" b="1" dirty="0">
-                  <a:solidFill>
-                    <a:srgbClr val="FF0000"/>
-                  </a:solidFill>
-                  <a:latin typeface="微软雅黑" panose="020B0503020204020204" pitchFamily="34" charset="-122"/>
-                  <a:ea typeface="微软雅黑" panose="020B0503020204020204" pitchFamily="34" charset="-122"/>
-                </a:rPr>
-                <a:t>Detected Image</a:t>
-              </a:r>
-              <a:endParaRPr lang="zh-CN" altLang="en-US" sz="2000" b="1" dirty="0">
-                <a:solidFill>
-                  <a:srgbClr val="FF0000"/>
-                </a:solidFill>
-                <a:latin typeface="微软雅黑" panose="020B0503020204020204" pitchFamily="34" charset="-122"/>
-                <a:ea typeface="微软雅黑" panose="020B0503020204020204" pitchFamily="34" charset="-122"/>
-              </a:endParaRPr>
-            </a:p>
-          </p:txBody>
-        </p:sp>
-      </p:grpSp>
-    </p:spTree>
-    <p:extLst>
-      <p:ext uri="{BB962C8B-B14F-4D97-AF65-F5344CB8AC3E}">
-        <p14:creationId xmlns:p14="http://schemas.microsoft.com/office/powerpoint/2010/main" val="3776509583"/>
-      </p:ext>
-    </p:extLst>
-  </p:cSld>
-  <p:clrMapOvr>
-    <a:masterClrMapping/>
-  </p:clrMapOvr>
-  <p:timing>
-    <p:tnLst>
-      <p:par>
-        <p:cTn id="1" dur="indefinite" restart="never" nodeType="tmRoot">
-          <p:childTnLst>
-            <p:seq concurrent="1" nextAc="seek">
-              <p:cTn id="2" dur="indefinite" nodeType="mainSeq">
-                <p:childTnLst>
-                  <p:par>
-                    <p:cTn id="3" fill="hold">
-                      <p:stCondLst>
-                        <p:cond delay="indefinite"/>
-                      </p:stCondLst>
-                      <p:childTnLst>
-                        <p:par>
-                          <p:cTn id="4" fill="hold">
-                            <p:stCondLst>
-                              <p:cond delay="0"/>
-                            </p:stCondLst>
-                            <p:childTnLst>
-                              <p:par>
-                                <p:cTn id="5" presetID="2" presetClass="entr" presetSubtype="4" fill="hold" nodeType="clickEffect">
-                                  <p:stCondLst>
-                                    <p:cond delay="0"/>
-                                  </p:stCondLst>
-                                  <p:childTnLst>
-                                    <p:set>
-                                      <p:cBhvr>
-                                        <p:cTn id="6" dur="1" fill="hold">
-                                          <p:stCondLst>
-                                            <p:cond delay="0"/>
-                                          </p:stCondLst>
-                                        </p:cTn>
-                                        <p:tgtEl>
-                                          <p:spTgt spid="2"/>
-                                        </p:tgtEl>
-                                        <p:attrNameLst>
-                                          <p:attrName>style.visibility</p:attrName>
-                                        </p:attrNameLst>
-                                      </p:cBhvr>
-                                      <p:to>
-                                        <p:strVal val="visible"/>
-                                      </p:to>
-                                    </p:set>
-                                    <p:anim calcmode="lin" valueType="num">
-                                      <p:cBhvr additive="base">
-                                        <p:cTn id="7" dur="500" fill="hold"/>
-                                        <p:tgtEl>
-                                          <p:spTgt spid="2"/>
-                                        </p:tgtEl>
-                                        <p:attrNameLst>
-                                          <p:attrName>ppt_x</p:attrName>
-                                        </p:attrNameLst>
-                                      </p:cBhvr>
-                                      <p:tavLst>
-                                        <p:tav tm="0">
-                                          <p:val>
-                                            <p:strVal val="#ppt_x"/>
-                                          </p:val>
-                                        </p:tav>
-                                        <p:tav tm="100000">
-                                          <p:val>
-                                            <p:strVal val="#ppt_x"/>
-                                          </p:val>
-                                        </p:tav>
-                                      </p:tavLst>
-                                    </p:anim>
-                                    <p:anim calcmode="lin" valueType="num">
-                                      <p:cBhvr additive="base">
-                                        <p:cTn id="8" dur="500" fill="hold"/>
-                                        <p:tgtEl>
-                                          <p:spTgt spid="2"/>
-                                        </p:tgtEl>
-                                        <p:attrNameLst>
-                                          <p:attrName>ppt_y</p:attrName>
-                                        </p:attrNameLst>
-                                      </p:cBhvr>
-                                      <p:tavLst>
-                                        <p:tav tm="0">
-                                          <p:val>
-                                            <p:strVal val="1+#ppt_h/2"/>
-                                          </p:val>
-                                        </p:tav>
-                                        <p:tav tm="100000">
-                                          <p:val>
-                                            <p:strVal val="#ppt_y"/>
-                                          </p:val>
-                                        </p:tav>
-                                      </p:tavLst>
-                                    </p:anim>
-                                  </p:childTnLst>
-                                </p:cTn>
-                              </p:par>
-                            </p:childTnLst>
-                          </p:cTn>
-                        </p:par>
-                      </p:childTnLst>
-                    </p:cTn>
-                  </p:par>
-                  <p:par>
-                    <p:cTn id="9" fill="hold">
-                      <p:stCondLst>
-                        <p:cond delay="indefinite"/>
-                      </p:stCondLst>
-                      <p:childTnLst>
-                        <p:par>
-                          <p:cTn id="10" fill="hold">
-                            <p:stCondLst>
-                              <p:cond delay="0"/>
-                            </p:stCondLst>
-                            <p:childTnLst>
-                              <p:par>
-                                <p:cTn id="11" presetID="2" presetClass="entr" presetSubtype="4" fill="hold" grpId="0" nodeType="clickEffect">
-                                  <p:stCondLst>
-                                    <p:cond delay="0"/>
-                                  </p:stCondLst>
-                                  <p:childTnLst>
-                                    <p:set>
-                                      <p:cBhvr>
-                                        <p:cTn id="12" dur="1" fill="hold">
-                                          <p:stCondLst>
-                                            <p:cond delay="0"/>
-                                          </p:stCondLst>
-                                        </p:cTn>
-                                        <p:tgtEl>
-                                          <p:spTgt spid="8"/>
-                                        </p:tgtEl>
-                                        <p:attrNameLst>
-                                          <p:attrName>style.visibility</p:attrName>
-                                        </p:attrNameLst>
-                                      </p:cBhvr>
-                                      <p:to>
-                                        <p:strVal val="visible"/>
-                                      </p:to>
-                                    </p:set>
-                                    <p:anim calcmode="lin" valueType="num">
-                                      <p:cBhvr additive="base">
-                                        <p:cTn id="13" dur="500" fill="hold"/>
-                                        <p:tgtEl>
-                                          <p:spTgt spid="8"/>
-                                        </p:tgtEl>
-                                        <p:attrNameLst>
-                                          <p:attrName>ppt_x</p:attrName>
-                                        </p:attrNameLst>
-                                      </p:cBhvr>
-                                      <p:tavLst>
-                                        <p:tav tm="0">
-                                          <p:val>
-                                            <p:strVal val="#ppt_x"/>
-                                          </p:val>
-                                        </p:tav>
-                                        <p:tav tm="100000">
-                                          <p:val>
-                                            <p:strVal val="#ppt_x"/>
-                                          </p:val>
-                                        </p:tav>
-                                      </p:tavLst>
-                                    </p:anim>
-                                    <p:anim calcmode="lin" valueType="num">
-                                      <p:cBhvr additive="base">
-                                        <p:cTn id="14" dur="500" fill="hold"/>
-                                        <p:tgtEl>
-                                          <p:spTgt spid="8"/>
-                                        </p:tgtEl>
-                                        <p:attrNameLst>
-                                          <p:attrName>ppt_y</p:attrName>
-                                        </p:attrNameLst>
-                                      </p:cBhvr>
-                                      <p:tavLst>
-                                        <p:tav tm="0">
-                                          <p:val>
-                                            <p:strVal val="1+#ppt_h/2"/>
-                                          </p:val>
-                                        </p:tav>
-                                        <p:tav tm="100000">
-                                          <p:val>
-                                            <p:strVal val="#ppt_y"/>
-                                          </p:val>
-                                        </p:tav>
-                                      </p:tavLst>
-                                    </p:anim>
-                                  </p:childTnLst>
-                                </p:cTn>
-                              </p:par>
-                            </p:childTnLst>
-                          </p:cTn>
-                        </p:par>
-                      </p:childTnLst>
-                    </p:cTn>
-                  </p:par>
-                  <p:par>
-                    <p:cTn id="15" fill="hold">
-                      <p:stCondLst>
-                        <p:cond delay="indefinite"/>
-                      </p:stCondLst>
-                      <p:childTnLst>
-                        <p:par>
-                          <p:cTn id="16" fill="hold">
-                            <p:stCondLst>
-                              <p:cond delay="0"/>
-                            </p:stCondLst>
-                            <p:childTnLst>
-                              <p:par>
-                                <p:cTn id="17" presetID="2" presetClass="entr" presetSubtype="4" fill="hold" nodeType="clickEffect">
-                                  <p:stCondLst>
-                                    <p:cond delay="0"/>
-                                  </p:stCondLst>
-                                  <p:childTnLst>
-                                    <p:set>
-                                      <p:cBhvr>
-                                        <p:cTn id="18" dur="1" fill="hold">
-                                          <p:stCondLst>
-                                            <p:cond delay="0"/>
-                                          </p:stCondLst>
-                                        </p:cTn>
-                                        <p:tgtEl>
-                                          <p:spTgt spid="9"/>
-                                        </p:tgtEl>
-                                        <p:attrNameLst>
-                                          <p:attrName>style.visibility</p:attrName>
-                                        </p:attrNameLst>
-                                      </p:cBhvr>
-                                      <p:to>
-                                        <p:strVal val="visible"/>
-                                      </p:to>
-                                    </p:set>
-                                    <p:anim calcmode="lin" valueType="num">
-                                      <p:cBhvr additive="base">
-                                        <p:cTn id="19" dur="500" fill="hold"/>
-                                        <p:tgtEl>
-                                          <p:spTgt spid="9"/>
-                                        </p:tgtEl>
-                                        <p:attrNameLst>
-                                          <p:attrName>ppt_x</p:attrName>
-                                        </p:attrNameLst>
-                                      </p:cBhvr>
-                                      <p:tavLst>
-                                        <p:tav tm="0">
-                                          <p:val>
-                                            <p:strVal val="#ppt_x"/>
-                                          </p:val>
-                                        </p:tav>
-                                        <p:tav tm="100000">
-                                          <p:val>
-                                            <p:strVal val="#ppt_x"/>
-                                          </p:val>
-                                        </p:tav>
-                                      </p:tavLst>
-                                    </p:anim>
-                                    <p:anim calcmode="lin" valueType="num">
-                                      <p:cBhvr additive="base">
-                                        <p:cTn id="20" dur="500" fill="hold"/>
-                                        <p:tgtEl>
-                                          <p:spTgt spid="9"/>
-                                        </p:tgtEl>
-                                        <p:attrNameLst>
-                                          <p:attrName>ppt_y</p:attrName>
-                                        </p:attrNameLst>
-                                      </p:cBhvr>
-                                      <p:tavLst>
-                                        <p:tav tm="0">
-                                          <p:val>
-                                            <p:strVal val="1+#ppt_h/2"/>
-                                          </p:val>
-                                        </p:tav>
-                                        <p:tav tm="100000">
-                                          <p:val>
-                                            <p:strVal val="#ppt_y"/>
-                                          </p:val>
-                                        </p:tav>
-                                      </p:tavLst>
-                                    </p:anim>
-                                  </p:childTnLst>
-                                </p:cTn>
-                              </p:par>
-                            </p:childTnLst>
-                          </p:cTn>
-                        </p:par>
-                      </p:childTnLst>
-                    </p:cTn>
-                  </p:par>
-                </p:childTnLst>
-              </p:cTn>
-              <p:prevCondLst>
-                <p:cond evt="onPrev" delay="0">
-                  <p:tgtEl>
-                    <p:sldTgt/>
-                  </p:tgtEl>
-                </p:cond>
-              </p:prevCondLst>
-              <p:nextCondLst>
-                <p:cond evt="onNext" delay="0">
-                  <p:tgtEl>
-                    <p:sldTgt/>
-                  </p:tgtEl>
-                </p:cond>
-              </p:nextCondLst>
-            </p:seq>
-          </p:childTnLst>
-        </p:cTn>
-      </p:par>
-    </p:tnLst>
-    <p:bldLst>
-      <p:bldP spid="8" grpId="0" animBg="1"/>
-    </p:bldLst>
-  </p:timing>
-</p:sld>
-</file>
-
 <file path=ppt/slides/slide4.xml><?xml version="1.0" encoding="utf-8"?>
 <p:sld xmlns:a="http://schemas.openxmlformats.org/drawingml/2006/main" xmlns:r="http://schemas.openxmlformats.org/officeDocument/2006/relationships" xmlns:p="http://schemas.openxmlformats.org/presentationml/2006/main">
   <p:cSld>
